--- a/decks/geog-resources/geog-resources_ch5_alaska-and-conflict.pptx
+++ b/decks/geog-resources/geog-resources_ch5_alaska-and-conflict.pptx
@@ -127,30 +127,30 @@
   <p:extLst>
     <p:ext uri="{521415D9-36F7-43E2-AB2F-B90AF26B5E84}">
       <p14:sectionLst xmlns:p14="http://schemas.microsoft.com/office/powerpoint/2010/main">
-        <p14:section name="Opening" id="{0ed96054-4fcf-b278-b77a-87f17fbbf34c}">
+        <p14:section name="Opening" id="{2386a697-7e3a-ab42-bb36-abdc9cf203e8}">
           <p14:sldIdLst>
             <p14:sldId id="256"/>
           </p14:sldIdLst>
         </p14:section>
-        <p14:section name="Gate" id="{cec3aa49-cda9-5c7d-28ea-73040b34c31a}">
+        <p14:section name="Gate" id="{eb26a72c-50a8-cb8a-0743-b7cd682930a8}">
           <p14:sldIdLst>
             <p14:sldId id="257"/>
             <p14:sldId id="258"/>
           </p14:sldIdLst>
         </p14:section>
-        <p14:section name="Pre-teach" id="{4884338c-1ea7-a40c-6155-d3dc74643b61}">
+        <p14:section name="Pre-teach" id="{23ceda27-5041-07bb-a449-35d90ac18537}">
           <p14:sldIdLst>
             <p14:sldId id="259"/>
             <p14:sldId id="260"/>
           </p14:sldIdLst>
         </p14:section>
-        <p14:section name="Read-along" id="{45d30057-28e3-d737-dd75-4d6a9d4496c8}">
+        <p14:section name="Read-along" id="{e693a106-e20c-443e-a591-44ed3d14a250}">
           <p14:sldIdLst>
             <p14:sldId id="261"/>
             <p14:sldId id="262"/>
           </p14:sldIdLst>
         </p14:section>
-        <p14:section name="Teach" id="{bc2715ac-1471-5890-78a2-678d2549e870}">
+        <p14:section name="Teach" id="{ce69dfc7-6390-305e-65c3-9e194b108d89}">
           <p14:sldIdLst>
             <p14:sldId id="263"/>
             <p14:sldId id="264"/>
@@ -160,7 +160,7 @@
             <p14:sldId id="268"/>
           </p14:sldIdLst>
         </p14:section>
-        <p14:section name="Routes" id="{294f279f-2639-4272-a18b-e742fd4b279d}">
+        <p14:section name="Routes" id="{85543a21-7333-6b1e-3dd0-5f19206dd534}">
           <p14:sldIdLst>
             <p14:sldId id="269"/>
             <p14:sldId id="270"/>
@@ -168,12 +168,12 @@
             <p14:sldId id="272"/>
           </p14:sldIdLst>
         </p14:section>
-        <p14:section name="Close" id="{f12f3736-a1f8-cd36-3287-255fd4e92874}">
+        <p14:section name="Close" id="{fa0dac34-5742-8261-b288-6794b18d44b9}">
           <p14:sldIdLst>
             <p14:sldId id="273"/>
           </p14:sldIdLst>
         </p14:section>
-        <p14:section name="Answers" id="{84a2df92-0a09-de36-c8f4-1fe2c1aa8f06}">
+        <p14:section name="Answers" id="{fee062de-7733-7655-b185-6afbcf4963fe}">
           <p14:sldIdLst>
             <p14:sldId id="274"/>
             <p14:sldId id="275"/>
